--- a/DataAnalysis_Track/decks/DA_S09_Grouping_and_joining_in_pandas.pptx
+++ b/DataAnalysis_Track/decks/DA_S09_Grouping_and_joining_in_pandas.pptx
@@ -480,7 +480,7 @@
 </file>
 
 <file path=ppt/notesSlides/notesSlide1.xml><?xml version="1.0" encoding="utf-8"?>
-<p:notes xmlns:a="http://schemas.openxmlformats.org/drawingml/2006/main" xmlns:p="http://schemas.openxmlformats.org/presentationml/2006/main" xmlns:r="http://schemas.openxmlformats.org/officeDocument/2006/relationships">
+<p:notes xmlns:a="http://schemas.openxmlformats.org/drawingml/2006/main" xmlns:p="http://schemas.openxmlformats.org/presentationml/2006/main">
   <p:cSld>
     <p:spTree>
       <p:nvGrpSpPr>
@@ -524,7 +524,87 @@
           <a:lstStyle/>
           <a:p>
             <a:r>
+              <a:t>TEACHING PURPOSE</a:t>
+            </a:r>
+          </a:p>
+          <a:p>
+            <a:r>
+              <a:t>Grouping and joining in pandas</a:t>
+            </a:r>
+          </a:p>
+          <a:p>
+            <a:r>
+              <a:t/>
+            </a:r>
+          </a:p>
+          <a:p>
+            <a:r>
+              <a:t>LECTURER CUE</a:t>
+            </a:r>
+          </a:p>
+          <a:p>
+            <a:r>
               <a:t>Start on time.</a:t>
+            </a:r>
+          </a:p>
+          <a:p>
+            <a:r>
+              <a:t/>
+            </a:r>
+          </a:p>
+          <a:p>
+            <a:r>
+              <a:t>EXPLAIN IN ORDINARY WORDS</a:t>
+            </a:r>
+          </a:p>
+          <a:p>
+            <a:r>
+              <a:t>Grain means what one row represents. A key identifies a row; a primary key may use more than one column. A join matches keys, and multiple matches can multiply rows.</a:t>
+            </a:r>
+          </a:p>
+          <a:p>
+            <a:r>
+              <a:t/>
+            </a:r>
+          </a:p>
+          <a:p>
+            <a:r>
+              <a:t>CHECK AND EXPECTED ANSWER</a:t>
+            </a:r>
+          </a:p>
+          <a:p>
+            <a:r>
+              <a:t>One order has two lines. After joining orders to lines, how many rows for it? Two. Summing a repeated order-level total would double-count.</a:t>
+            </a:r>
+          </a:p>
+          <a:p>
+            <a:r>
+              <a:t/>
+            </a:r>
+          </a:p>
+          <a:p>
+            <a:r>
+              <a:t>IF LEARNERS ARE STUCK</a:t>
+            </a:r>
+          </a:p>
+          <a:p>
+            <a:r>
+              <a:t>Write one example row from each table. Circle keys and trace each match. Aggregate to the intended grain and check counts and totals.</a:t>
+            </a:r>
+          </a:p>
+          <a:p>
+            <a:r>
+              <a:t/>
+            </a:r>
+          </a:p>
+          <a:p>
+            <a:r>
+              <a:t>NEXT</a:t>
+            </a:r>
+          </a:p>
+          <a:p>
+            <a:r>
+              <a:t>Where tonight sits. Move on after a learner can explain the current example or required action.</a:t>
             </a:r>
           </a:p>
         </p:txBody>
@@ -550,7 +630,7 @@
 </file>
 
 <file path=ppt/notesSlides/notesSlide10.xml><?xml version="1.0" encoding="utf-8"?>
-<p:notes xmlns:a="http://schemas.openxmlformats.org/drawingml/2006/main" xmlns:p="http://schemas.openxmlformats.org/presentationml/2006/main" xmlns:r="http://schemas.openxmlformats.org/officeDocument/2006/relationships">
+<p:notes xmlns:a="http://schemas.openxmlformats.org/drawingml/2006/main" xmlns:p="http://schemas.openxmlformats.org/presentationml/2006/main">
   <p:cSld>
     <p:spTree>
       <p:nvGrpSpPr>
@@ -594,7 +674,57 @@
           <a:lstStyle/>
           <a:p>
             <a:r>
+              <a:t>TEACHING PURPOSE</a:t>
+            </a:r>
+          </a:p>
+          <a:p>
+            <a:r>
+              <a:t>Break</a:t>
+            </a:r>
+          </a:p>
+          <a:p>
+            <a:r>
+              <a:t/>
+            </a:r>
+          </a:p>
+          <a:p>
+            <a:r>
+              <a:t>CONNECT</a:t>
+            </a:r>
+          </a:p>
+          <a:p>
+            <a:r>
+              <a:t>Build on the preceding slide: groupby, and the four characters that fix it.</a:t>
+            </a:r>
+          </a:p>
+          <a:p>
+            <a:r>
+              <a:t/>
+            </a:r>
+          </a:p>
+          <a:p>
+            <a:r>
+              <a:t>LECTURER CUE</a:t>
+            </a:r>
+          </a:p>
+          <a:p>
+            <a:r>
               <a:t>Ten minutes.</a:t>
+            </a:r>
+          </a:p>
+          <a:p>
+            <a:r>
+              <a:t/>
+            </a:r>
+          </a:p>
+          <a:p>
+            <a:r>
+              <a:t>NEXT</a:t>
+            </a:r>
+          </a:p>
+          <a:p>
+            <a:r>
+              <a:t>merge, and reconciling two tools. Move on after a learner can explain the current example or required action.</a:t>
             </a:r>
           </a:p>
         </p:txBody>
@@ -619,8 +749,8 @@
 </p:notes>
 </file>
 
-<file path=ppt/notesSlides/notesSlide11.xml><?xml version="1.0" encoding="utf-8"?>
-<p:notes xmlns:a="http://schemas.openxmlformats.org/drawingml/2006/main" xmlns:p="http://schemas.openxmlformats.org/presentationml/2006/main" xmlns:r="http://schemas.openxmlformats.org/officeDocument/2006/relationships">
+<file path=ppt/notesSlides/notesSlide10006.xml><?xml version="1.0" encoding="utf-8"?>
+<p:notes xmlns:a="http://schemas.openxmlformats.org/drawingml/2006/main" xmlns:p="http://schemas.openxmlformats.org/presentationml/2006/main">
   <p:cSld>
     <p:spTree>
       <p:nvGrpSpPr>
@@ -662,7 +792,91 @@
         <p:txBody>
           <a:bodyPr/>
           <a:lstStyle/>
-          <a:p/>
+          <a:p>
+            <a:r>
+              <a:t>TEACHING PURPOSE</a:t>
+            </a:r>
+          </a:p>
+          <a:p>
+            <a:r>
+              <a:t>groupby: split, apply, combine</a:t>
+            </a:r>
+          </a:p>
+          <a:p>
+            <a:r>
+              <a:t/>
+            </a:r>
+          </a:p>
+          <a:p>
+            <a:r>
+              <a:t>CONNECT</a:t>
+            </a:r>
+          </a:p>
+          <a:p>
+            <a:r>
+              <a:t>Build on the preceding slide: Your SQL and your pandas give different answers..</a:t>
+            </a:r>
+          </a:p>
+          <a:p>
+            <a:r>
+              <a:t/>
+            </a:r>
+          </a:p>
+          <a:p>
+            <a:r>
+              <a:t>EXPLAIN IN ORDINARY WORDS</a:t>
+            </a:r>
+          </a:p>
+          <a:p>
+            <a:r>
+              <a:t>Grouping puts rows sharing a key into buckets, then computes a result for each bucket. WHERE filters rows before SQL grouping; HAVING filters grouped results.</a:t>
+            </a:r>
+          </a:p>
+          <a:p>
+            <a:r>
+              <a:t/>
+            </a:r>
+          </a:p>
+          <a:p>
+            <a:r>
+              <a:t>CHECK AND EXPECTED ANSWER</a:t>
+            </a:r>
+          </a:p>
+          <a:p>
+            <a:r>
+              <a:t>Which condition keeps only groups with more than five rows? HAVING COUNT(*) &gt; 5.</a:t>
+            </a:r>
+          </a:p>
+          <a:p>
+            <a:r>
+              <a:t/>
+            </a:r>
+          </a:p>
+          <a:p>
+            <a:r>
+              <a:t>IF LEARNERS ARE STUCK</a:t>
+            </a:r>
+          </a:p>
+          <a:p>
+            <a:r>
+              <a:t>Draw two buckets and count by hand. Name the intended output grain before writing the aggregation.</a:t>
+            </a:r>
+          </a:p>
+          <a:p>
+            <a:r>
+              <a:t/>
+            </a:r>
+          </a:p>
+          <a:p>
+            <a:r>
+              <a:t>NEXT</a:t>
+            </a:r>
+          </a:p>
+          <a:p>
+            <a:r>
+              <a:t>groupby. Move on after a learner can explain the current example or required action.</a:t>
+            </a:r>
+          </a:p>
         </p:txBody>
       </p:sp>
       <p:sp>
@@ -685,8 +899,8 @@
 </p:notes>
 </file>
 
-<file path=ppt/notesSlides/notesSlide12.xml><?xml version="1.0" encoding="utf-8"?>
-<p:notes xmlns:a="http://schemas.openxmlformats.org/drawingml/2006/main" xmlns:p="http://schemas.openxmlformats.org/presentationml/2006/main" xmlns:r="http://schemas.openxmlformats.org/officeDocument/2006/relationships">
+<file path=ppt/notesSlides/notesSlide10012.xml><?xml version="1.0" encoding="utf-8"?>
+<p:notes xmlns:a="http://schemas.openxmlformats.org/drawingml/2006/main" xmlns:p="http://schemas.openxmlformats.org/presentationml/2006/main">
   <p:cSld>
     <p:spTree>
       <p:nvGrpSpPr>
@@ -728,7 +942,91 @@
         <p:txBody>
           <a:bodyPr/>
           <a:lstStyle/>
-          <a:p/>
+          <a:p>
+            <a:r>
+              <a:t>TEACHING PURPOSE</a:t>
+            </a:r>
+          </a:p>
+          <a:p>
+            <a:r>
+              <a:t>merge, and reconciling two tools</a:t>
+            </a:r>
+          </a:p>
+          <a:p>
+            <a:r>
+              <a:t/>
+            </a:r>
+          </a:p>
+          <a:p>
+            <a:r>
+              <a:t>CONNECT</a:t>
+            </a:r>
+          </a:p>
+          <a:p>
+            <a:r>
+              <a:t>Build on the preceding slide: Break.</a:t>
+            </a:r>
+          </a:p>
+          <a:p>
+            <a:r>
+              <a:t/>
+            </a:r>
+          </a:p>
+          <a:p>
+            <a:r>
+              <a:t>EXPLAIN IN ORDINARY WORDS</a:t>
+            </a:r>
+          </a:p>
+          <a:p>
+            <a:r>
+              <a:t>Grain means what one row represents. A key identifies a row; a primary key may use more than one column. A join matches keys, and multiple matches can multiply rows.</a:t>
+            </a:r>
+          </a:p>
+          <a:p>
+            <a:r>
+              <a:t/>
+            </a:r>
+          </a:p>
+          <a:p>
+            <a:r>
+              <a:t>CHECK AND EXPECTED ANSWER</a:t>
+            </a:r>
+          </a:p>
+          <a:p>
+            <a:r>
+              <a:t>One order has two lines. After joining orders to lines, how many rows for it? Two. Summing a repeated order-level total would double-count.</a:t>
+            </a:r>
+          </a:p>
+          <a:p>
+            <a:r>
+              <a:t/>
+            </a:r>
+          </a:p>
+          <a:p>
+            <a:r>
+              <a:t>IF LEARNERS ARE STUCK</a:t>
+            </a:r>
+          </a:p>
+          <a:p>
+            <a:r>
+              <a:t>Write one example row from each table. Circle keys and trace each match. Aggregate to the intended grain and check counts and totals.</a:t>
+            </a:r>
+          </a:p>
+          <a:p>
+            <a:r>
+              <a:t/>
+            </a:r>
+          </a:p>
+          <a:p>
+            <a:r>
+              <a:t>NEXT</a:t>
+            </a:r>
+          </a:p>
+          <a:p>
+            <a:r>
+              <a:t>merge, with the guard rails on. Move on after a learner can explain the current example or required action.</a:t>
+            </a:r>
+          </a:p>
         </p:txBody>
       </p:sp>
       <p:sp>
@@ -751,8 +1049,8 @@
 </p:notes>
 </file>
 
-<file path=ppt/notesSlides/notesSlide13.xml><?xml version="1.0" encoding="utf-8"?>
-<p:notes xmlns:a="http://schemas.openxmlformats.org/drawingml/2006/main" xmlns:p="http://schemas.openxmlformats.org/presentationml/2006/main" xmlns:r="http://schemas.openxmlformats.org/officeDocument/2006/relationships">
+<file path=ppt/notesSlides/notesSlide11.xml><?xml version="1.0" encoding="utf-8"?>
+<p:notes xmlns:a="http://schemas.openxmlformats.org/drawingml/2006/main" xmlns:p="http://schemas.openxmlformats.org/presentationml/2006/main">
   <p:cSld>
     <p:spTree>
       <p:nvGrpSpPr>
@@ -796,7 +1094,87 @@
           <a:lstStyle/>
           <a:p>
             <a:r>
-              <a:t>Same question, same data, different tool. They have to agree, and where they do not you have found something.</a:t>
+              <a:t>TEACHING PURPOSE</a:t>
+            </a:r>
+          </a:p>
+          <a:p>
+            <a:r>
+              <a:t>merge, with the guard rails on</a:t>
+            </a:r>
+          </a:p>
+          <a:p>
+            <a:r>
+              <a:t/>
+            </a:r>
+          </a:p>
+          <a:p>
+            <a:r>
+              <a:t>CONNECT</a:t>
+            </a:r>
+          </a:p>
+          <a:p>
+            <a:r>
+              <a:t>Build on the preceding slide: merge, and reconciling two tools.</a:t>
+            </a:r>
+          </a:p>
+          <a:p>
+            <a:r>
+              <a:t/>
+            </a:r>
+          </a:p>
+          <a:p>
+            <a:r>
+              <a:t>EXPLAIN IN ORDINARY WORDS</a:t>
+            </a:r>
+          </a:p>
+          <a:p>
+            <a:r>
+              <a:t>Grain means what one row represents. A key identifies a row; a primary key may use more than one column. A join matches keys, and multiple matches can multiply rows.</a:t>
+            </a:r>
+          </a:p>
+          <a:p>
+            <a:r>
+              <a:t/>
+            </a:r>
+          </a:p>
+          <a:p>
+            <a:r>
+              <a:t>CHECK AND EXPECTED ANSWER</a:t>
+            </a:r>
+          </a:p>
+          <a:p>
+            <a:r>
+              <a:t>One order has two lines. After joining orders to lines, how many rows for it? Two. Summing a repeated order-level total would double-count.</a:t>
+            </a:r>
+          </a:p>
+          <a:p>
+            <a:r>
+              <a:t/>
+            </a:r>
+          </a:p>
+          <a:p>
+            <a:r>
+              <a:t>IF LEARNERS ARE STUCK</a:t>
+            </a:r>
+          </a:p>
+          <a:p>
+            <a:r>
+              <a:t>Write one example row from each table. Circle keys and trace each match. Aggregate to the intended grain and check counts and totals.</a:t>
+            </a:r>
+          </a:p>
+          <a:p>
+            <a:r>
+              <a:t/>
+            </a:r>
+          </a:p>
+          <a:p>
+            <a:r>
+              <a:t>NEXT</a:t>
+            </a:r>
+          </a:p>
+          <a:p>
+            <a:r>
+              <a:t>The same three tables meeting, so region and month exist. Move on after a learner can explain the current example or required action.</a:t>
             </a:r>
           </a:p>
         </p:txBody>
@@ -821,8 +1199,8 @@
 </p:notes>
 </file>
 
-<file path=ppt/notesSlides/notesSlide14.xml><?xml version="1.0" encoding="utf-8"?>
-<p:notes xmlns:a="http://schemas.openxmlformats.org/drawingml/2006/main" xmlns:p="http://schemas.openxmlformats.org/presentationml/2006/main" xmlns:r="http://schemas.openxmlformats.org/officeDocument/2006/relationships">
+<file path=ppt/notesSlides/notesSlide12.xml><?xml version="1.0" encoding="utf-8"?>
+<p:notes xmlns:a="http://schemas.openxmlformats.org/drawingml/2006/main" xmlns:p="http://schemas.openxmlformats.org/presentationml/2006/main">
   <p:cSld>
     <p:spTree>
       <p:nvGrpSpPr>
@@ -864,7 +1242,91 @@
         <p:txBody>
           <a:bodyPr/>
           <a:lstStyle/>
-          <a:p/>
+          <a:p>
+            <a:r>
+              <a:t>TEACHING PURPOSE</a:t>
+            </a:r>
+          </a:p>
+          <a:p>
+            <a:r>
+              <a:t>The same three tables meeting, so region and month exist</a:t>
+            </a:r>
+          </a:p>
+          <a:p>
+            <a:r>
+              <a:t/>
+            </a:r>
+          </a:p>
+          <a:p>
+            <a:r>
+              <a:t>CONNECT</a:t>
+            </a:r>
+          </a:p>
+          <a:p>
+            <a:r>
+              <a:t>Build on the preceding slide: merge, with the guard rails on.</a:t>
+            </a:r>
+          </a:p>
+          <a:p>
+            <a:r>
+              <a:t/>
+            </a:r>
+          </a:p>
+          <a:p>
+            <a:r>
+              <a:t>EXPLAIN IN ORDINARY WORDS</a:t>
+            </a:r>
+          </a:p>
+          <a:p>
+            <a:r>
+              <a:t>Grain means what one row represents. A key identifies a row; a primary key may use more than one column. A join matches keys, and multiple matches can multiply rows.</a:t>
+            </a:r>
+          </a:p>
+          <a:p>
+            <a:r>
+              <a:t/>
+            </a:r>
+          </a:p>
+          <a:p>
+            <a:r>
+              <a:t>CHECK AND EXPECTED ANSWER</a:t>
+            </a:r>
+          </a:p>
+          <a:p>
+            <a:r>
+              <a:t>One order has two lines. After joining orders to lines, how many rows for it? Two. Summing a repeated order-level total would double-count.</a:t>
+            </a:r>
+          </a:p>
+          <a:p>
+            <a:r>
+              <a:t/>
+            </a:r>
+          </a:p>
+          <a:p>
+            <a:r>
+              <a:t>IF LEARNERS ARE STUCK</a:t>
+            </a:r>
+          </a:p>
+          <a:p>
+            <a:r>
+              <a:t>Write one example row from each table. Circle keys and trace each match. Aggregate to the intended grain and check counts and totals.</a:t>
+            </a:r>
+          </a:p>
+          <a:p>
+            <a:r>
+              <a:t/>
+            </a:r>
+          </a:p>
+          <a:p>
+            <a:r>
+              <a:t>NEXT</a:t>
+            </a:r>
+          </a:p>
+          <a:p>
+            <a:r>
+              <a:t>Reconciling two tools, properly. Move on after a learner can explain the current example or required action.</a:t>
+            </a:r>
+          </a:p>
         </p:txBody>
       </p:sp>
       <p:sp>
@@ -887,8 +1349,8 @@
 </p:notes>
 </file>
 
-<file path=ppt/notesSlides/notesSlide15.xml><?xml version="1.0" encoding="utf-8"?>
-<p:notes xmlns:a="http://schemas.openxmlformats.org/drawingml/2006/main" xmlns:p="http://schemas.openxmlformats.org/presentationml/2006/main" xmlns:r="http://schemas.openxmlformats.org/officeDocument/2006/relationships">
+<file path=ppt/notesSlides/notesSlide13.xml><?xml version="1.0" encoding="utf-8"?>
+<p:notes xmlns:a="http://schemas.openxmlformats.org/drawingml/2006/main" xmlns:p="http://schemas.openxmlformats.org/presentationml/2006/main">
   <p:cSld>
     <p:spTree>
       <p:nvGrpSpPr>
@@ -932,7 +1394,102 @@
           <a:lstStyle/>
           <a:p>
             <a:r>
-              <a:t>A merge that silently multiplies rows. validate turns that into an exception instead of a wrong number.</a:t>
+              <a:t>TEACHING PURPOSE</a:t>
+            </a:r>
+          </a:p>
+          <a:p>
+            <a:r>
+              <a:t>Reconciling two tools, properly</a:t>
+            </a:r>
+          </a:p>
+          <a:p>
+            <a:r>
+              <a:t/>
+            </a:r>
+          </a:p>
+          <a:p>
+            <a:r>
+              <a:t>CONNECT</a:t>
+            </a:r>
+          </a:p>
+          <a:p>
+            <a:r>
+              <a:t>Build on the preceding slide: The same three tables meeting, so region and month exist.</a:t>
+            </a:r>
+          </a:p>
+          <a:p>
+            <a:r>
+              <a:t/>
+            </a:r>
+          </a:p>
+          <a:p>
+            <a:r>
+              <a:t>LECTURER CUE</a:t>
+            </a:r>
+          </a:p>
+          <a:p>
+            <a:r>
+              <a:t>Same question, same data, different tool. They have to agree, and where they do not you have found something.</a:t>
+            </a:r>
+          </a:p>
+          <a:p>
+            <a:r>
+              <a:t/>
+            </a:r>
+          </a:p>
+          <a:p>
+            <a:r>
+              <a:t>EXPLAIN IN ORDINARY WORDS</a:t>
+            </a:r>
+          </a:p>
+          <a:p>
+            <a:r>
+              <a:t>A category is a label, not an amount. Indicator columns record whether a row belongs to each category, usually with 0 or 1. Fit the encoding on training data and reuse it.</a:t>
+            </a:r>
+          </a:p>
+          <a:p>
+            <a:r>
+              <a:t/>
+            </a:r>
+          </a:p>
+          <a:p>
+            <a:r>
+              <a:t>CHECK AND EXPECTED ANSWER</a:t>
+            </a:r>
+          </a:p>
+          <a:p>
+            <a:r>
+              <a:t>Does assigning red=1 and blue=2 mean blue is twice red? No, those are labels.</a:t>
+            </a:r>
+          </a:p>
+          <a:p>
+            <a:r>
+              <a:t/>
+            </a:r>
+          </a:p>
+          <a:p>
+            <a:r>
+              <a:t>IF LEARNERS ARE STUCK</a:t>
+            </a:r>
+          </a:p>
+          <a:p>
+            <a:r>
+              <a:t>Make two rows and two category columns by hand before showing the encoder.</a:t>
+            </a:r>
+          </a:p>
+          <a:p>
+            <a:r>
+              <a:t/>
+            </a:r>
+          </a:p>
+          <a:p>
+            <a:r>
+              <a:t>NEXT</a:t>
+            </a:r>
+          </a:p>
+          <a:p>
+            <a:r>
+              <a:t>Checkpoint 2. Move on after a learner can explain the current example or required action.</a:t>
             </a:r>
           </a:p>
         </p:txBody>
@@ -957,8 +1514,8 @@
 </p:notes>
 </file>
 
-<file path=ppt/notesSlides/notesSlide16.xml><?xml version="1.0" encoding="utf-8"?>
-<p:notes xmlns:a="http://schemas.openxmlformats.org/drawingml/2006/main" xmlns:p="http://schemas.openxmlformats.org/presentationml/2006/main" xmlns:r="http://schemas.openxmlformats.org/officeDocument/2006/relationships">
+<file path=ppt/notesSlides/notesSlide14.xml><?xml version="1.0" encoding="utf-8"?>
+<p:notes xmlns:a="http://schemas.openxmlformats.org/drawingml/2006/main" xmlns:p="http://schemas.openxmlformats.org/presentationml/2006/main">
   <p:cSld>
     <p:spTree>
       <p:nvGrpSpPr>
@@ -1000,7 +1557,106 @@
         <p:txBody>
           <a:bodyPr/>
           <a:lstStyle/>
-          <a:p/>
+          <a:p>
+            <a:r>
+              <a:t>TEACHING PURPOSE</a:t>
+            </a:r>
+          </a:p>
+          <a:p>
+            <a:r>
+              <a:t>Checkpoint 2</a:t>
+            </a:r>
+          </a:p>
+          <a:p>
+            <a:r>
+              <a:t/>
+            </a:r>
+          </a:p>
+          <a:p>
+            <a:r>
+              <a:t>CONNECT</a:t>
+            </a:r>
+          </a:p>
+          <a:p>
+            <a:r>
+              <a:t>Build on the preceding slide: Reconciling two tools, properly.</a:t>
+            </a:r>
+          </a:p>
+          <a:p>
+            <a:r>
+              <a:t/>
+            </a:r>
+          </a:p>
+          <a:p>
+            <a:r>
+              <a:t>EXPLAIN IN ORDINARY WORDS</a:t>
+            </a:r>
+          </a:p>
+          <a:p>
+            <a:r>
+              <a:t>A cleaning decision needs evidence, a stated rule and a before/after check. Similar rows may be genuine repeated events. Reconciliation compares totals built under the same definitions.</a:t>
+            </a:r>
+          </a:p>
+          <a:p>
+            <a:r>
+              <a:t/>
+            </a:r>
+          </a:p>
+          <a:p>
+            <a:r>
+              <a:t>CHECK AND EXPECTED ANSWER</a:t>
+            </a:r>
+          </a:p>
+          <a:p>
+            <a:r>
+              <a:t>May we delete every repeated amount? No. Check the row identifier and the table grain first.</a:t>
+            </a:r>
+          </a:p>
+          <a:p>
+            <a:r>
+              <a:t/>
+            </a:r>
+          </a:p>
+          <a:p>
+            <a:r>
+              <a:t>IF LEARNERS ARE STUCK</a:t>
+            </a:r>
+          </a:p>
+          <a:p>
+            <a:r>
+              <a:t>Keep raw data, record counts before and after each action, then explain any remaining difference instead of forcing totals to agree.</a:t>
+            </a:r>
+          </a:p>
+          <a:p>
+            <a:r>
+              <a:t/>
+            </a:r>
+          </a:p>
+          <a:p>
+            <a:r>
+              <a:t>ASSIGNMENT HANDOVER</a:t>
+            </a:r>
+          </a:p>
+          <a:p>
+            <a:r>
+              <a:t>Open the matching public student guide and show the exact starter filename, required outputs and upload set. Ask one learner to repeat what to submit and where. IUEA Student Registration Number is required freeform text; learners enter their own number. A saved repository is not a submitted form. Read the live deadline and keep the submission confirmation. Do not release an assessment that is still awaiting grading validation.</a:t>
+            </a:r>
+          </a:p>
+          <a:p>
+            <a:r>
+              <a:t/>
+            </a:r>
+          </a:p>
+          <a:p>
+            <a:r>
+              <a:t>NEXT</a:t>
+            </a:r>
+          </a:p>
+          <a:p>
+            <a:r>
+              <a:t>A merge that silently multiplies rows. validate turns that into an exception instead of a wrong number.. Move on after a learner can explain the current example or required action.</a:t>
+            </a:r>
+          </a:p>
         </p:txBody>
       </p:sp>
       <p:sp>
@@ -1023,8 +1679,8 @@
 </p:notes>
 </file>
 
-<file path=ppt/notesSlides/notesSlide17.xml><?xml version="1.0" encoding="utf-8"?>
-<p:notes xmlns:a="http://schemas.openxmlformats.org/drawingml/2006/main" xmlns:p="http://schemas.openxmlformats.org/presentationml/2006/main" xmlns:r="http://schemas.openxmlformats.org/officeDocument/2006/relationships">
+<file path=ppt/notesSlides/notesSlide15.xml><?xml version="1.0" encoding="utf-8"?>
+<p:notes xmlns:a="http://schemas.openxmlformats.org/drawingml/2006/main" xmlns:p="http://schemas.openxmlformats.org/presentationml/2006/main">
   <p:cSld>
     <p:spTree>
       <p:nvGrpSpPr>
@@ -1066,7 +1722,106 @@
         <p:txBody>
           <a:bodyPr/>
           <a:lstStyle/>
-          <a:p/>
+          <a:p>
+            <a:r>
+              <a:t>TEACHING PURPOSE</a:t>
+            </a:r>
+          </a:p>
+          <a:p>
+            <a:r>
+              <a:t>A merge that silently multiplies rows. validate turns that into an exception instead of a wrong number.</a:t>
+            </a:r>
+          </a:p>
+          <a:p>
+            <a:r>
+              <a:t/>
+            </a:r>
+          </a:p>
+          <a:p>
+            <a:r>
+              <a:t>CONNECT</a:t>
+            </a:r>
+          </a:p>
+          <a:p>
+            <a:r>
+              <a:t>Build on the preceding slide: Checkpoint 2.</a:t>
+            </a:r>
+          </a:p>
+          <a:p>
+            <a:r>
+              <a:t/>
+            </a:r>
+          </a:p>
+          <a:p>
+            <a:r>
+              <a:t>LECTURER CUE</a:t>
+            </a:r>
+          </a:p>
+          <a:p>
+            <a:r>
+              <a:t>A merge that silently multiplies rows. validate turns that into an exception instead of a wrong number.</a:t>
+            </a:r>
+          </a:p>
+          <a:p>
+            <a:r>
+              <a:t/>
+            </a:r>
+          </a:p>
+          <a:p>
+            <a:r>
+              <a:t>EXPLAIN IN ORDINARY WORDS</a:t>
+            </a:r>
+          </a:p>
+          <a:p>
+            <a:r>
+              <a:t>Grain means what one row represents. A key identifies a row; a primary key may use more than one column. A join matches keys, and multiple matches can multiply rows.</a:t>
+            </a:r>
+          </a:p>
+          <a:p>
+            <a:r>
+              <a:t/>
+            </a:r>
+          </a:p>
+          <a:p>
+            <a:r>
+              <a:t>CHECK AND EXPECTED ANSWER</a:t>
+            </a:r>
+          </a:p>
+          <a:p>
+            <a:r>
+              <a:t>One order has two lines. After joining orders to lines, how many rows for it? Two. Summing a repeated order-level total would double-count.</a:t>
+            </a:r>
+          </a:p>
+          <a:p>
+            <a:r>
+              <a:t/>
+            </a:r>
+          </a:p>
+          <a:p>
+            <a:r>
+              <a:t>IF LEARNERS ARE STUCK</a:t>
+            </a:r>
+          </a:p>
+          <a:p>
+            <a:r>
+              <a:t>Write one example row from each table. Circle keys and trace each match. Aggregate to the intended grain and check counts and totals.</a:t>
+            </a:r>
+          </a:p>
+          <a:p>
+            <a:r>
+              <a:t/>
+            </a:r>
+          </a:p>
+          <a:p>
+            <a:r>
+              <a:t>NEXT</a:t>
+            </a:r>
+          </a:p>
+          <a:p>
+            <a:r>
+              <a:t>Can you answer these?. Move on after a learner can explain the current example or required action.</a:t>
+            </a:r>
+          </a:p>
         </p:txBody>
       </p:sp>
       <p:sp>
@@ -1089,8 +1844,8 @@
 </p:notes>
 </file>
 
-<file path=ppt/notesSlides/notesSlide18.xml><?xml version="1.0" encoding="utf-8"?>
-<p:notes xmlns:a="http://schemas.openxmlformats.org/drawingml/2006/main" xmlns:p="http://schemas.openxmlformats.org/presentationml/2006/main" xmlns:r="http://schemas.openxmlformats.org/officeDocument/2006/relationships">
+<file path=ppt/notesSlides/notesSlide16.xml><?xml version="1.0" encoding="utf-8"?>
+<p:notes xmlns:a="http://schemas.openxmlformats.org/drawingml/2006/main" xmlns:p="http://schemas.openxmlformats.org/presentationml/2006/main">
   <p:cSld>
     <p:spTree>
       <p:nvGrpSpPr>
@@ -1134,7 +1889,157 @@
           <a:lstStyle/>
           <a:p>
             <a:r>
-              <a:t>Rebuild the rep revenue report in pandas and set it beside your SQL output. Any difference is a finding, and finding one is a pass. A clean match you cannot explain is not.</a:t>
+              <a:t>TEACHING PURPOSE</a:t>
+            </a:r>
+          </a:p>
+          <a:p>
+            <a:r>
+              <a:t>Can you answer these?</a:t>
+            </a:r>
+          </a:p>
+          <a:p>
+            <a:r>
+              <a:t/>
+            </a:r>
+          </a:p>
+          <a:p>
+            <a:r>
+              <a:t>CONNECT</a:t>
+            </a:r>
+          </a:p>
+          <a:p>
+            <a:r>
+              <a:t>Build on the preceding slide: A merge that silently multiplies rows. validate turns that into an exception instead of a wrong number..</a:t>
+            </a:r>
+          </a:p>
+          <a:p>
+            <a:r>
+              <a:t/>
+            </a:r>
+          </a:p>
+          <a:p>
+            <a:r>
+              <a:t>EXPLAIN IN ORDINARY WORDS</a:t>
+            </a:r>
+          </a:p>
+          <a:p>
+            <a:r>
+              <a:t>Grain means what one row represents. A key identifies a row; a primary key may use more than one column. A join matches keys, and multiple matches can multiply rows.</a:t>
+            </a:r>
+          </a:p>
+          <a:p>
+            <a:r>
+              <a:t/>
+            </a:r>
+          </a:p>
+          <a:p>
+            <a:r>
+              <a:t>CHECK AND EXPECTED ANSWER</a:t>
+            </a:r>
+          </a:p>
+          <a:p>
+            <a:r>
+              <a:t>One order has two lines. After joining orders to lines, how many rows for it? Two. Summing a repeated order-level total would double-count.</a:t>
+            </a:r>
+          </a:p>
+          <a:p>
+            <a:r>
+              <a:t/>
+            </a:r>
+          </a:p>
+          <a:p>
+            <a:r>
+              <a:t>IF LEARNERS ARE STUCK</a:t>
+            </a:r>
+          </a:p>
+          <a:p>
+            <a:r>
+              <a:t>Write one example row from each table. Circle keys and trace each match. Aggregate to the intended grain and check counts and totals.</a:t>
+            </a:r>
+          </a:p>
+          <a:p>
+            <a:r>
+              <a:t/>
+            </a:r>
+          </a:p>
+          <a:p>
+            <a:r>
+              <a:t>DISCUSSION KEY FOR THIS SLIDE</a:t>
+            </a:r>
+          </a:p>
+          <a:p>
+            <a:r>
+              <a:t>ANSWERS</a:t>
+            </a:r>
+          </a:p>
+          <a:p>
+            <a:r>
+              <a:t>How did you do?</a:t>
+            </a:r>
+          </a:p>
+          <a:p>
+            <a:r>
+              <a:t>A</a:t>
+            </a:r>
+          </a:p>
+          <a:p>
+            <a:r>
+              <a:t>Cannot select a column you can see</a:t>
+            </a:r>
+          </a:p>
+          <a:p>
+            <a:r>
+              <a:t>It is in the index, not the columns. .reset_index() moves the grouping keys back and everything downstream works.</a:t>
+            </a:r>
+          </a:p>
+          <a:p>
+            <a:r>
+              <a:t>B</a:t>
+            </a:r>
+          </a:p>
+          <a:p>
+            <a:r>
+              <a:t>A merge that multiplied the rows</a:t>
+            </a:r>
+          </a:p>
+          <a:p>
+            <a:r>
+              <a:t>Fan-out: the right-hand side had several rows per key, so every left row was repeated once per match. Pass validate="one_to_many" and pandas raises instead. Aggregate the many side first, then merge.</a:t>
+            </a:r>
+          </a:p>
+          <a:p>
+            <a:r>
+              <a:t>C</a:t>
+            </a:r>
+          </a:p>
+          <a:p>
+            <a:r>
+              <a:t>A gap between SQL and pandas</a:t>
+            </a:r>
+          </a:p>
+          <a:p>
+            <a:r>
+              <a:t>The filters, first and always: status, the date window, and whether one side dropped the 172 rows with no customer. That last one alone is UGX 390,632,335. Only look at the arithmetic once the row sets match.</a:t>
+            </a:r>
+          </a:p>
+          <a:p>
+            <a:r>
+              <a:t>Let learners attempt first; use this to explain the reasoning, not just reveal the answer.</a:t>
+            </a:r>
+          </a:p>
+          <a:p>
+            <a:r>
+              <a:t/>
+            </a:r>
+          </a:p>
+          <a:p>
+            <a:r>
+              <a:t>NEXT</a:t>
+            </a:r>
+          </a:p>
+          <a:p>
+            <a:r>
+              <a:t>How did you do?. Move on after a learner can explain the current example or required action.</a:t>
             </a:r>
           </a:p>
         </p:txBody>
@@ -1159,8 +2064,8 @@
 </p:notes>
 </file>
 
-<file path=ppt/notesSlides/notesSlide19.xml><?xml version="1.0" encoding="utf-8"?>
-<p:notes xmlns:a="http://schemas.openxmlformats.org/drawingml/2006/main" xmlns:p="http://schemas.openxmlformats.org/presentationml/2006/main" xmlns:r="http://schemas.openxmlformats.org/officeDocument/2006/relationships">
+<file path=ppt/notesSlides/notesSlide17.xml><?xml version="1.0" encoding="utf-8"?>
+<p:notes xmlns:a="http://schemas.openxmlformats.org/drawingml/2006/main" xmlns:p="http://schemas.openxmlformats.org/presentationml/2006/main">
   <p:cSld>
     <p:spTree>
       <p:nvGrpSpPr>
@@ -1202,7 +2107,91 @@
         <p:txBody>
           <a:bodyPr/>
           <a:lstStyle/>
-          <a:p/>
+          <a:p>
+            <a:r>
+              <a:t>TEACHING PURPOSE</a:t>
+            </a:r>
+          </a:p>
+          <a:p>
+            <a:r>
+              <a:t>How did you do?</a:t>
+            </a:r>
+          </a:p>
+          <a:p>
+            <a:r>
+              <a:t/>
+            </a:r>
+          </a:p>
+          <a:p>
+            <a:r>
+              <a:t>CONNECT</a:t>
+            </a:r>
+          </a:p>
+          <a:p>
+            <a:r>
+              <a:t>Build on the preceding slide: Can you answer these?.</a:t>
+            </a:r>
+          </a:p>
+          <a:p>
+            <a:r>
+              <a:t/>
+            </a:r>
+          </a:p>
+          <a:p>
+            <a:r>
+              <a:t>EXPLAIN IN ORDINARY WORDS</a:t>
+            </a:r>
+          </a:p>
+          <a:p>
+            <a:r>
+              <a:t>Grain means what one row represents. A key identifies a row; a primary key may use more than one column. A join matches keys, and multiple matches can multiply rows.</a:t>
+            </a:r>
+          </a:p>
+          <a:p>
+            <a:r>
+              <a:t/>
+            </a:r>
+          </a:p>
+          <a:p>
+            <a:r>
+              <a:t>CHECK AND EXPECTED ANSWER</a:t>
+            </a:r>
+          </a:p>
+          <a:p>
+            <a:r>
+              <a:t>One order has two lines. After joining orders to lines, how many rows for it? Two. Summing a repeated order-level total would double-count.</a:t>
+            </a:r>
+          </a:p>
+          <a:p>
+            <a:r>
+              <a:t/>
+            </a:r>
+          </a:p>
+          <a:p>
+            <a:r>
+              <a:t>IF LEARNERS ARE STUCK</a:t>
+            </a:r>
+          </a:p>
+          <a:p>
+            <a:r>
+              <a:t>Write one example row from each table. Circle keys and trace each match. Aggregate to the intended grain and check counts and totals.</a:t>
+            </a:r>
+          </a:p>
+          <a:p>
+            <a:r>
+              <a:t/>
+            </a:r>
+          </a:p>
+          <a:p>
+            <a:r>
+              <a:t>NEXT</a:t>
+            </a:r>
+          </a:p>
+          <a:p>
+            <a:r>
+              <a:t>Reconcile pandas against SQL. Move on after a learner can explain the current example or required action.</a:t>
+            </a:r>
+          </a:p>
         </p:txBody>
       </p:sp>
       <p:sp>
@@ -1225,8 +2214,8 @@
 </p:notes>
 </file>
 
-<file path=ppt/notesSlides/notesSlide2.xml><?xml version="1.0" encoding="utf-8"?>
-<p:notes xmlns:a="http://schemas.openxmlformats.org/drawingml/2006/main" xmlns:p="http://schemas.openxmlformats.org/presentationml/2006/main" xmlns:r="http://schemas.openxmlformats.org/officeDocument/2006/relationships">
+<file path=ppt/notesSlides/notesSlide18.xml><?xml version="1.0" encoding="utf-8"?>
+<p:notes xmlns:a="http://schemas.openxmlformats.org/drawingml/2006/main" xmlns:p="http://schemas.openxmlformats.org/presentationml/2006/main">
   <p:cSld>
     <p:spTree>
       <p:nvGrpSpPr>
@@ -1270,7 +2259,102 @@
           <a:lstStyle/>
           <a:p>
             <a:r>
-              <a:t>Tonight is session 9 of twelve.</a:t>
+              <a:t>TEACHING PURPOSE</a:t>
+            </a:r>
+          </a:p>
+          <a:p>
+            <a:r>
+              <a:t>Reconcile pandas against SQL</a:t>
+            </a:r>
+          </a:p>
+          <a:p>
+            <a:r>
+              <a:t/>
+            </a:r>
+          </a:p>
+          <a:p>
+            <a:r>
+              <a:t>CONNECT</a:t>
+            </a:r>
+          </a:p>
+          <a:p>
+            <a:r>
+              <a:t>Build on the preceding slide: How did you do?.</a:t>
+            </a:r>
+          </a:p>
+          <a:p>
+            <a:r>
+              <a:t/>
+            </a:r>
+          </a:p>
+          <a:p>
+            <a:r>
+              <a:t>LECTURER CUE</a:t>
+            </a:r>
+          </a:p>
+          <a:p>
+            <a:r>
+              <a:t>Rebuild the rep revenue report in pandas and set it beside your SQL output. Any difference is a finding, and finding one is a pass. A clean match you cannot explain is not.</a:t>
+            </a:r>
+          </a:p>
+          <a:p>
+            <a:r>
+              <a:t/>
+            </a:r>
+          </a:p>
+          <a:p>
+            <a:r>
+              <a:t>EXPLAIN IN ORDINARY WORDS</a:t>
+            </a:r>
+          </a:p>
+          <a:p>
+            <a:r>
+              <a:t>A DataFrame is a labelled table. A Series is a single labelled sequence, often one column. A dtype describes stored values, but the import may infer something unsuitable.</a:t>
+            </a:r>
+          </a:p>
+          <a:p>
+            <a:r>
+              <a:t/>
+            </a:r>
+          </a:p>
+          <a:p>
+            <a:r>
+              <a:t>CHECK AND EXPECTED ANSWER</a:t>
+            </a:r>
+          </a:p>
+          <a:p>
+            <a:r>
+              <a:t>Does a price that looks numeric prove the column is numeric? No. Inspect its dtype and troublesome values before conversion.</a:t>
+            </a:r>
+          </a:p>
+          <a:p>
+            <a:r>
+              <a:t/>
+            </a:r>
+          </a:p>
+          <a:p>
+            <a:r>
+              <a:t>IF LEARNERS ARE STUCK</a:t>
+            </a:r>
+          </a:p>
+          <a:p>
+            <a:r>
+              <a:t>Use head, shape and dtypes to locate the table, count rows/columns and inspect storage. Check units and missing values before calculating.</a:t>
+            </a:r>
+          </a:p>
+          <a:p>
+            <a:r>
+              <a:t/>
+            </a:r>
+          </a:p>
+          <a:p>
+            <a:r>
+              <a:t>NEXT</a:t>
+            </a:r>
+          </a:p>
+          <a:p>
+            <a:r>
+              <a:t>What you can do now. Move on after a learner can explain the current example or required action.</a:t>
             </a:r>
           </a:p>
         </p:txBody>
@@ -1295,8 +2379,8 @@
 </p:notes>
 </file>
 
-<file path=ppt/notesSlides/notesSlide20.xml><?xml version="1.0" encoding="utf-8"?>
-<p:notes xmlns:a="http://schemas.openxmlformats.org/drawingml/2006/main" xmlns:p="http://schemas.openxmlformats.org/presentationml/2006/main" xmlns:r="http://schemas.openxmlformats.org/officeDocument/2006/relationships">
+<file path=ppt/notesSlides/notesSlide19.xml><?xml version="1.0" encoding="utf-8"?>
+<p:notes xmlns:a="http://schemas.openxmlformats.org/drawingml/2006/main" xmlns:p="http://schemas.openxmlformats.org/presentationml/2006/main">
   <p:cSld>
     <p:spTree>
       <p:nvGrpSpPr>
@@ -1340,7 +2424,87 @@
           <a:lstStyle/>
           <a:p>
             <a:r>
-              <a:t>Take one report somebody at work produces by hand every month and write the pandas that would produce it. It does not have to run yet.</a:t>
+              <a:t>TEACHING PURPOSE</a:t>
+            </a:r>
+          </a:p>
+          <a:p>
+            <a:r>
+              <a:t>What you can do now</a:t>
+            </a:r>
+          </a:p>
+          <a:p>
+            <a:r>
+              <a:t/>
+            </a:r>
+          </a:p>
+          <a:p>
+            <a:r>
+              <a:t>CONNECT</a:t>
+            </a:r>
+          </a:p>
+          <a:p>
+            <a:r>
+              <a:t>Build on the preceding slide: Reconcile pandas against SQL.</a:t>
+            </a:r>
+          </a:p>
+          <a:p>
+            <a:r>
+              <a:t/>
+            </a:r>
+          </a:p>
+          <a:p>
+            <a:r>
+              <a:t>EXPLAIN IN ORDINARY WORDS</a:t>
+            </a:r>
+          </a:p>
+          <a:p>
+            <a:r>
+              <a:t>Grain means what one row represents. A key identifies a row; a primary key may use more than one column. A join matches keys, and multiple matches can multiply rows.</a:t>
+            </a:r>
+          </a:p>
+          <a:p>
+            <a:r>
+              <a:t/>
+            </a:r>
+          </a:p>
+          <a:p>
+            <a:r>
+              <a:t>CHECK AND EXPECTED ANSWER</a:t>
+            </a:r>
+          </a:p>
+          <a:p>
+            <a:r>
+              <a:t>One order has two lines. After joining orders to lines, how many rows for it? Two. Summing a repeated order-level total would double-count.</a:t>
+            </a:r>
+          </a:p>
+          <a:p>
+            <a:r>
+              <a:t/>
+            </a:r>
+          </a:p>
+          <a:p>
+            <a:r>
+              <a:t>IF LEARNERS ARE STUCK</a:t>
+            </a:r>
+          </a:p>
+          <a:p>
+            <a:r>
+              <a:t>Write one example row from each table. Circle keys and trace each match. Aggregate to the intended grain and check counts and totals.</a:t>
+            </a:r>
+          </a:p>
+          <a:p>
+            <a:r>
+              <a:t/>
+            </a:r>
+          </a:p>
+          <a:p>
+            <a:r>
+              <a:t>NEXT</a:t>
+            </a:r>
+          </a:p>
+          <a:p>
+            <a:r>
+              <a:t>Before the next session. Move on after a learner can explain the current example or required action.</a:t>
             </a:r>
           </a:p>
         </p:txBody>
@@ -1365,8 +2529,8 @@
 </p:notes>
 </file>
 
-<file path=ppt/notesSlides/notesSlide21.xml><?xml version="1.0" encoding="utf-8"?>
-<p:notes xmlns:a="http://schemas.openxmlformats.org/drawingml/2006/main" xmlns:p="http://schemas.openxmlformats.org/presentationml/2006/main" xmlns:r="http://schemas.openxmlformats.org/officeDocument/2006/relationships">
+<file path=ppt/notesSlides/notesSlide2.xml><?xml version="1.0" encoding="utf-8"?>
+<p:notes xmlns:a="http://schemas.openxmlformats.org/drawingml/2006/main" xmlns:p="http://schemas.openxmlformats.org/presentationml/2006/main">
   <p:cSld>
     <p:spTree>
       <p:nvGrpSpPr>
@@ -1410,7 +2574,102 @@
           <a:lstStyle/>
           <a:p>
             <a:r>
-              <a:t>Getting the same number twice, two different ways, is the only self-check available to somebody working alone. It is also the first thing you will be asked for when a number of yours is doubted.</a:t>
+              <a:t>TEACHING PURPOSE</a:t>
+            </a:r>
+          </a:p>
+          <a:p>
+            <a:r>
+              <a:t>Where tonight sits</a:t>
+            </a:r>
+          </a:p>
+          <a:p>
+            <a:r>
+              <a:t/>
+            </a:r>
+          </a:p>
+          <a:p>
+            <a:r>
+              <a:t>CONNECT</a:t>
+            </a:r>
+          </a:p>
+          <a:p>
+            <a:r>
+              <a:t>Build on the preceding slide: Grouping and joining in pandas.</a:t>
+            </a:r>
+          </a:p>
+          <a:p>
+            <a:r>
+              <a:t/>
+            </a:r>
+          </a:p>
+          <a:p>
+            <a:r>
+              <a:t>LECTURER CUE</a:t>
+            </a:r>
+          </a:p>
+          <a:p>
+            <a:r>
+              <a:t>Tonight is session 9 of fifteen.</a:t>
+            </a:r>
+          </a:p>
+          <a:p>
+            <a:r>
+              <a:t/>
+            </a:r>
+          </a:p>
+          <a:p>
+            <a:r>
+              <a:t>EXPLAIN IN ORDINARY WORDS</a:t>
+            </a:r>
+          </a:p>
+          <a:p>
+            <a:r>
+              <a:t>Grain means what one row represents. A key identifies a row; a primary key may use more than one column. A join matches keys, and multiple matches can multiply rows.</a:t>
+            </a:r>
+          </a:p>
+          <a:p>
+            <a:r>
+              <a:t/>
+            </a:r>
+          </a:p>
+          <a:p>
+            <a:r>
+              <a:t>CHECK AND EXPECTED ANSWER</a:t>
+            </a:r>
+          </a:p>
+          <a:p>
+            <a:r>
+              <a:t>One order has two lines. After joining orders to lines, how many rows for it? Two. Summing a repeated order-level total would double-count.</a:t>
+            </a:r>
+          </a:p>
+          <a:p>
+            <a:r>
+              <a:t/>
+            </a:r>
+          </a:p>
+          <a:p>
+            <a:r>
+              <a:t>IF LEARNERS ARE STUCK</a:t>
+            </a:r>
+          </a:p>
+          <a:p>
+            <a:r>
+              <a:t>Write one example row from each table. Circle keys and trace each match. Aggregate to the intended grain and check counts and totals.</a:t>
+            </a:r>
+          </a:p>
+          <a:p>
+            <a:r>
+              <a:t/>
+            </a:r>
+          </a:p>
+          <a:p>
+            <a:r>
+              <a:t>NEXT</a:t>
+            </a:r>
+          </a:p>
+          <a:p>
+            <a:r>
+              <a:t>The words for tonight. Move on after a learner can explain the current example or required action.</a:t>
             </a:r>
           </a:p>
         </p:txBody>
@@ -1435,8 +2694,8 @@
 </p:notes>
 </file>
 
-<file path=ppt/notesSlides/notesSlide3.xml><?xml version="1.0" encoding="utf-8"?>
-<p:notes xmlns:a="http://schemas.openxmlformats.org/drawingml/2006/main" xmlns:p="http://schemas.openxmlformats.org/presentationml/2006/main" xmlns:r="http://schemas.openxmlformats.org/officeDocument/2006/relationships">
+<file path=ppt/notesSlides/notesSlide20.xml><?xml version="1.0" encoding="utf-8"?>
+<p:notes xmlns:a="http://schemas.openxmlformats.org/drawingml/2006/main" xmlns:p="http://schemas.openxmlformats.org/presentationml/2006/main">
   <p:cSld>
     <p:spTree>
       <p:nvGrpSpPr>
@@ -1478,7 +2737,106 @@
         <p:txBody>
           <a:bodyPr/>
           <a:lstStyle/>
-          <a:p/>
+          <a:p>
+            <a:r>
+              <a:t>TEACHING PURPOSE</a:t>
+            </a:r>
+          </a:p>
+          <a:p>
+            <a:r>
+              <a:t>Before the next session</a:t>
+            </a:r>
+          </a:p>
+          <a:p>
+            <a:r>
+              <a:t/>
+            </a:r>
+          </a:p>
+          <a:p>
+            <a:r>
+              <a:t>CONNECT</a:t>
+            </a:r>
+          </a:p>
+          <a:p>
+            <a:r>
+              <a:t>Build on the preceding slide: What you can do now.</a:t>
+            </a:r>
+          </a:p>
+          <a:p>
+            <a:r>
+              <a:t/>
+            </a:r>
+          </a:p>
+          <a:p>
+            <a:r>
+              <a:t>LECTURER CUE</a:t>
+            </a:r>
+          </a:p>
+          <a:p>
+            <a:r>
+              <a:t>Take one report somebody at work produces by hand every month and write the pandas that would produce it. It does not have to run yet.</a:t>
+            </a:r>
+          </a:p>
+          <a:p>
+            <a:r>
+              <a:t/>
+            </a:r>
+          </a:p>
+          <a:p>
+            <a:r>
+              <a:t>EXPLAIN IN ORDINARY WORDS</a:t>
+            </a:r>
+          </a:p>
+          <a:p>
+            <a:r>
+              <a:t>A DataFrame is a labelled table. A Series is a single labelled sequence, often one column. A dtype describes stored values, but the import may infer something unsuitable.</a:t>
+            </a:r>
+          </a:p>
+          <a:p>
+            <a:r>
+              <a:t/>
+            </a:r>
+          </a:p>
+          <a:p>
+            <a:r>
+              <a:t>CHECK AND EXPECTED ANSWER</a:t>
+            </a:r>
+          </a:p>
+          <a:p>
+            <a:r>
+              <a:t>Does a price that looks numeric prove the column is numeric? No. Inspect its dtype and troublesome values before conversion.</a:t>
+            </a:r>
+          </a:p>
+          <a:p>
+            <a:r>
+              <a:t/>
+            </a:r>
+          </a:p>
+          <a:p>
+            <a:r>
+              <a:t>IF LEARNERS ARE STUCK</a:t>
+            </a:r>
+          </a:p>
+          <a:p>
+            <a:r>
+              <a:t>Use head, shape and dtypes to locate the table, count rows/columns and inspect storage. Check units and missing values before calculating.</a:t>
+            </a:r>
+          </a:p>
+          <a:p>
+            <a:r>
+              <a:t/>
+            </a:r>
+          </a:p>
+          <a:p>
+            <a:r>
+              <a:t>NEXT</a:t>
+            </a:r>
+          </a:p>
+          <a:p>
+            <a:r>
+              <a:t>Two tools, one answer. Move on after a learner can explain the current example or required action.</a:t>
+            </a:r>
+          </a:p>
         </p:txBody>
       </p:sp>
       <p:sp>
@@ -1501,8 +2859,8 @@
 </p:notes>
 </file>
 
-<file path=ppt/notesSlides/notesSlide4.xml><?xml version="1.0" encoding="utf-8"?>
-<p:notes xmlns:a="http://schemas.openxmlformats.org/drawingml/2006/main" xmlns:p="http://schemas.openxmlformats.org/presentationml/2006/main" xmlns:r="http://schemas.openxmlformats.org/officeDocument/2006/relationships">
+<file path=ppt/notesSlides/notesSlide21.xml><?xml version="1.0" encoding="utf-8"?>
+<p:notes xmlns:a="http://schemas.openxmlformats.org/drawingml/2006/main" xmlns:p="http://schemas.openxmlformats.org/presentationml/2006/main">
   <p:cSld>
     <p:spTree>
       <p:nvGrpSpPr>
@@ -1546,7 +2904,42 @@
           <a:lstStyle/>
           <a:p>
             <a:r>
-              <a:t>These three are what tonight is marked against, in the sense that the lab checks them.</a:t>
+              <a:t>TEACHING PURPOSE</a:t>
+            </a:r>
+          </a:p>
+          <a:p>
+            <a:r>
+              <a:t>Two tools, one answer</a:t>
+            </a:r>
+          </a:p>
+          <a:p>
+            <a:r>
+              <a:t/>
+            </a:r>
+          </a:p>
+          <a:p>
+            <a:r>
+              <a:t>CONNECT</a:t>
+            </a:r>
+          </a:p>
+          <a:p>
+            <a:r>
+              <a:t>Build on the preceding slide: Before the next session.</a:t>
+            </a:r>
+          </a:p>
+          <a:p>
+            <a:r>
+              <a:t/>
+            </a:r>
+          </a:p>
+          <a:p>
+            <a:r>
+              <a:t>LECTURER CUE</a:t>
+            </a:r>
+          </a:p>
+          <a:p>
+            <a:r>
+              <a:t>Getting the same number twice, two different ways, is the only self-check available to somebody working alone. It is also the first thing you will be asked for when a number of yours is doubted.</a:t>
             </a:r>
           </a:p>
         </p:txBody>
@@ -1571,8 +2964,8 @@
 </p:notes>
 </file>
 
-<file path=ppt/notesSlides/notesSlide5.xml><?xml version="1.0" encoding="utf-8"?>
-<p:notes xmlns:a="http://schemas.openxmlformats.org/drawingml/2006/main" xmlns:p="http://schemas.openxmlformats.org/presentationml/2006/main" xmlns:r="http://schemas.openxmlformats.org/officeDocument/2006/relationships">
+<file path=ppt/notesSlides/notesSlide3.xml><?xml version="1.0" encoding="utf-8"?>
+<p:notes xmlns:a="http://schemas.openxmlformats.org/drawingml/2006/main" xmlns:p="http://schemas.openxmlformats.org/presentationml/2006/main">
   <p:cSld>
     <p:spTree>
       <p:nvGrpSpPr>
@@ -1616,7 +3009,87 @@
           <a:lstStyle/>
           <a:p>
             <a:r>
-              <a:t>Usually neither. They are answering slightly different questions, and finding out which is the actual skill.</a:t>
+              <a:t>TEACHING PURPOSE</a:t>
+            </a:r>
+          </a:p>
+          <a:p>
+            <a:r>
+              <a:t>The words for tonight</a:t>
+            </a:r>
+          </a:p>
+          <a:p>
+            <a:r>
+              <a:t/>
+            </a:r>
+          </a:p>
+          <a:p>
+            <a:r>
+              <a:t>CONNECT</a:t>
+            </a:r>
+          </a:p>
+          <a:p>
+            <a:r>
+              <a:t>Build on the preceding slide: Where tonight sits.</a:t>
+            </a:r>
+          </a:p>
+          <a:p>
+            <a:r>
+              <a:t/>
+            </a:r>
+          </a:p>
+          <a:p>
+            <a:r>
+              <a:t>EXPLAIN IN ORDINARY WORDS</a:t>
+            </a:r>
+          </a:p>
+          <a:p>
+            <a:r>
+              <a:t>Grain means what one row represents. A key identifies a row; a primary key may use more than one column. A join matches keys, and multiple matches can multiply rows.</a:t>
+            </a:r>
+          </a:p>
+          <a:p>
+            <a:r>
+              <a:t/>
+            </a:r>
+          </a:p>
+          <a:p>
+            <a:r>
+              <a:t>CHECK AND EXPECTED ANSWER</a:t>
+            </a:r>
+          </a:p>
+          <a:p>
+            <a:r>
+              <a:t>One order has two lines. After joining orders to lines, how many rows for it? Two. Summing a repeated order-level total would double-count.</a:t>
+            </a:r>
+          </a:p>
+          <a:p>
+            <a:r>
+              <a:t/>
+            </a:r>
+          </a:p>
+          <a:p>
+            <a:r>
+              <a:t>IF LEARNERS ARE STUCK</a:t>
+            </a:r>
+          </a:p>
+          <a:p>
+            <a:r>
+              <a:t>Write one example row from each table. Circle keys and trace each match. Aggregate to the intended grain and check counts and totals.</a:t>
+            </a:r>
+          </a:p>
+          <a:p>
+            <a:r>
+              <a:t/>
+            </a:r>
+          </a:p>
+          <a:p>
+            <a:r>
+              <a:t>NEXT</a:t>
+            </a:r>
+          </a:p>
+          <a:p>
+            <a:r>
+              <a:t>By the end of tonight you can…. Move on after a learner can explain the current example or required action.</a:t>
             </a:r>
           </a:p>
         </p:txBody>
@@ -1641,8 +3114,8 @@
 </p:notes>
 </file>
 
-<file path=ppt/notesSlides/notesSlide6.xml><?xml version="1.0" encoding="utf-8"?>
-<p:notes xmlns:a="http://schemas.openxmlformats.org/drawingml/2006/main" xmlns:p="http://schemas.openxmlformats.org/presentationml/2006/main" xmlns:r="http://schemas.openxmlformats.org/officeDocument/2006/relationships">
+<file path=ppt/notesSlides/notesSlide4.xml><?xml version="1.0" encoding="utf-8"?>
+<p:notes xmlns:a="http://schemas.openxmlformats.org/drawingml/2006/main" xmlns:p="http://schemas.openxmlformats.org/presentationml/2006/main">
   <p:cSld>
     <p:spTree>
       <p:nvGrpSpPr>
@@ -1686,7 +3159,102 @@
           <a:lstStyle/>
           <a:p>
             <a:r>
-              <a:t>Split the rows into groups, apply an aggregation to each, combine the results into a new table. It is SQL's GROUP BY and it is your pivot table.</a:t>
+              <a:t>TEACHING PURPOSE</a:t>
+            </a:r>
+          </a:p>
+          <a:p>
+            <a:r>
+              <a:t>By the end of tonight you can…</a:t>
+            </a:r>
+          </a:p>
+          <a:p>
+            <a:r>
+              <a:t/>
+            </a:r>
+          </a:p>
+          <a:p>
+            <a:r>
+              <a:t>CONNECT</a:t>
+            </a:r>
+          </a:p>
+          <a:p>
+            <a:r>
+              <a:t>Build on the preceding slide: The words for tonight.</a:t>
+            </a:r>
+          </a:p>
+          <a:p>
+            <a:r>
+              <a:t/>
+            </a:r>
+          </a:p>
+          <a:p>
+            <a:r>
+              <a:t>LECTURER CUE</a:t>
+            </a:r>
+          </a:p>
+          <a:p>
+            <a:r>
+              <a:t>These three are what tonight is marked against, in the sense that the lab checks them.</a:t>
+            </a:r>
+          </a:p>
+          <a:p>
+            <a:r>
+              <a:t/>
+            </a:r>
+          </a:p>
+          <a:p>
+            <a:r>
+              <a:t>EXPLAIN IN ORDINARY WORDS</a:t>
+            </a:r>
+          </a:p>
+          <a:p>
+            <a:r>
+              <a:t>Grain means what one row represents. A key identifies a row; a primary key may use more than one column. A join matches keys, and multiple matches can multiply rows.</a:t>
+            </a:r>
+          </a:p>
+          <a:p>
+            <a:r>
+              <a:t/>
+            </a:r>
+          </a:p>
+          <a:p>
+            <a:r>
+              <a:t>CHECK AND EXPECTED ANSWER</a:t>
+            </a:r>
+          </a:p>
+          <a:p>
+            <a:r>
+              <a:t>One order has two lines. After joining orders to lines, how many rows for it? Two. Summing a repeated order-level total would double-count.</a:t>
+            </a:r>
+          </a:p>
+          <a:p>
+            <a:r>
+              <a:t/>
+            </a:r>
+          </a:p>
+          <a:p>
+            <a:r>
+              <a:t>IF LEARNERS ARE STUCK</a:t>
+            </a:r>
+          </a:p>
+          <a:p>
+            <a:r>
+              <a:t>Write one example row from each table. Circle keys and trace each match. Aggregate to the intended grain and check counts and totals.</a:t>
+            </a:r>
+          </a:p>
+          <a:p>
+            <a:r>
+              <a:t/>
+            </a:r>
+          </a:p>
+          <a:p>
+            <a:r>
+              <a:t>NEXT</a:t>
+            </a:r>
+          </a:p>
+          <a:p>
+            <a:r>
+              <a:t>Your SQL and your pandas give different answers.. Move on after a learner can explain the current example or required action.</a:t>
             </a:r>
           </a:p>
         </p:txBody>
@@ -1711,8 +3279,8 @@
 </p:notes>
 </file>
 
-<file path=ppt/notesSlides/notesSlide7.xml><?xml version="1.0" encoding="utf-8"?>
-<p:notes xmlns:a="http://schemas.openxmlformats.org/drawingml/2006/main" xmlns:p="http://schemas.openxmlformats.org/presentationml/2006/main" xmlns:r="http://schemas.openxmlformats.org/officeDocument/2006/relationships">
+<file path=ppt/notesSlides/notesSlide5.xml><?xml version="1.0" encoding="utf-8"?>
+<p:notes xmlns:a="http://schemas.openxmlformats.org/drawingml/2006/main" xmlns:p="http://schemas.openxmlformats.org/presentationml/2006/main">
   <p:cSld>
     <p:spTree>
       <p:nvGrpSpPr>
@@ -1756,7 +3324,102 @@
           <a:lstStyle/>
           <a:p>
             <a:r>
-              <a:t>The labels down the side of a DataFrame. After a groupby your grouping keys become the index rather than columns, which is the commonest confusion in pandas.</a:t>
+              <a:t>TEACHING PURPOSE</a:t>
+            </a:r>
+          </a:p>
+          <a:p>
+            <a:r>
+              <a:t>Your SQL and your pandas give different answers.</a:t>
+            </a:r>
+          </a:p>
+          <a:p>
+            <a:r>
+              <a:t/>
+            </a:r>
+          </a:p>
+          <a:p>
+            <a:r>
+              <a:t>CONNECT</a:t>
+            </a:r>
+          </a:p>
+          <a:p>
+            <a:r>
+              <a:t>Build on the preceding slide: By the end of tonight you can….</a:t>
+            </a:r>
+          </a:p>
+          <a:p>
+            <a:r>
+              <a:t/>
+            </a:r>
+          </a:p>
+          <a:p>
+            <a:r>
+              <a:t>LECTURER CUE</a:t>
+            </a:r>
+          </a:p>
+          <a:p>
+            <a:r>
+              <a:t>Usually neither. They are answering slightly different questions, and finding out which is the actual skill.</a:t>
+            </a:r>
+          </a:p>
+          <a:p>
+            <a:r>
+              <a:t/>
+            </a:r>
+          </a:p>
+          <a:p>
+            <a:r>
+              <a:t>EXPLAIN IN ORDINARY WORDS</a:t>
+            </a:r>
+          </a:p>
+          <a:p>
+            <a:r>
+              <a:t>A DataFrame is a labelled table. A Series is a single labelled sequence, often one column. A dtype describes stored values, but the import may infer something unsuitable.</a:t>
+            </a:r>
+          </a:p>
+          <a:p>
+            <a:r>
+              <a:t/>
+            </a:r>
+          </a:p>
+          <a:p>
+            <a:r>
+              <a:t>CHECK AND EXPECTED ANSWER</a:t>
+            </a:r>
+          </a:p>
+          <a:p>
+            <a:r>
+              <a:t>Does a price that looks numeric prove the column is numeric? No. Inspect its dtype and troublesome values before conversion.</a:t>
+            </a:r>
+          </a:p>
+          <a:p>
+            <a:r>
+              <a:t/>
+            </a:r>
+          </a:p>
+          <a:p>
+            <a:r>
+              <a:t>IF LEARNERS ARE STUCK</a:t>
+            </a:r>
+          </a:p>
+          <a:p>
+            <a:r>
+              <a:t>Use head, shape and dtypes to locate the table, count rows/columns and inspect storage. Check units and missing values before calculating.</a:t>
+            </a:r>
+          </a:p>
+          <a:p>
+            <a:r>
+              <a:t/>
+            </a:r>
+          </a:p>
+          <a:p>
+            <a:r>
+              <a:t>NEXT</a:t>
+            </a:r>
+          </a:p>
+          <a:p>
+            <a:r>
+              <a:t>groupby: split, apply, combine. Move on after a learner can explain the current example or required action.</a:t>
             </a:r>
           </a:p>
         </p:txBody>
@@ -1781,8 +3444,8 @@
 </p:notes>
 </file>
 
-<file path=ppt/notesSlides/notesSlide8.xml><?xml version="1.0" encoding="utf-8"?>
-<p:notes xmlns:a="http://schemas.openxmlformats.org/drawingml/2006/main" xmlns:p="http://schemas.openxmlformats.org/presentationml/2006/main" xmlns:r="http://schemas.openxmlformats.org/officeDocument/2006/relationships">
+<file path=ppt/notesSlides/notesSlide6.xml><?xml version="1.0" encoding="utf-8"?>
+<p:notes xmlns:a="http://schemas.openxmlformats.org/drawingml/2006/main" xmlns:p="http://schemas.openxmlformats.org/presentationml/2006/main">
   <p:cSld>
     <p:spTree>
       <p:nvGrpSpPr>
@@ -1826,7 +3489,102 @@
           <a:lstStyle/>
           <a:p>
             <a:r>
-              <a:t>merge is pandas' join. validate is the argument that makes it REFUSE a join that would multiply rows instead of silently doing it.</a:t>
+              <a:t>TEACHING PURPOSE</a:t>
+            </a:r>
+          </a:p>
+          <a:p>
+            <a:r>
+              <a:t>groupby</a:t>
+            </a:r>
+          </a:p>
+          <a:p>
+            <a:r>
+              <a:t/>
+            </a:r>
+          </a:p>
+          <a:p>
+            <a:r>
+              <a:t>CONNECT</a:t>
+            </a:r>
+          </a:p>
+          <a:p>
+            <a:r>
+              <a:t>Build on the preceding slide: groupby: split, apply, combine.</a:t>
+            </a:r>
+          </a:p>
+          <a:p>
+            <a:r>
+              <a:t/>
+            </a:r>
+          </a:p>
+          <a:p>
+            <a:r>
+              <a:t>LECTURER CUE</a:t>
+            </a:r>
+          </a:p>
+          <a:p>
+            <a:r>
+              <a:t>Split the rows into groups, apply an aggregation to each, combine the results into a new table. It is SQL's GROUP BY and it is your pivot table.</a:t>
+            </a:r>
+          </a:p>
+          <a:p>
+            <a:r>
+              <a:t/>
+            </a:r>
+          </a:p>
+          <a:p>
+            <a:r>
+              <a:t>EXPLAIN IN ORDINARY WORDS</a:t>
+            </a:r>
+          </a:p>
+          <a:p>
+            <a:r>
+              <a:t>Grouping puts rows sharing a key into buckets, then computes a result for each bucket. WHERE filters rows before SQL grouping; HAVING filters grouped results.</a:t>
+            </a:r>
+          </a:p>
+          <a:p>
+            <a:r>
+              <a:t/>
+            </a:r>
+          </a:p>
+          <a:p>
+            <a:r>
+              <a:t>CHECK AND EXPECTED ANSWER</a:t>
+            </a:r>
+          </a:p>
+          <a:p>
+            <a:r>
+              <a:t>Which condition keeps only groups with more than five rows? HAVING COUNT(*) &gt; 5.</a:t>
+            </a:r>
+          </a:p>
+          <a:p>
+            <a:r>
+              <a:t/>
+            </a:r>
+          </a:p>
+          <a:p>
+            <a:r>
+              <a:t>IF LEARNERS ARE STUCK</a:t>
+            </a:r>
+          </a:p>
+          <a:p>
+            <a:r>
+              <a:t>Draw two buckets and count by hand. Name the intended output grain before writing the aggregation.</a:t>
+            </a:r>
+          </a:p>
+          <a:p>
+            <a:r>
+              <a:t/>
+            </a:r>
+          </a:p>
+          <a:p>
+            <a:r>
+              <a:t>NEXT</a:t>
+            </a:r>
+          </a:p>
+          <a:p>
+            <a:r>
+              <a:t>Index. Move on after a learner can explain the current example or required action.</a:t>
             </a:r>
           </a:p>
         </p:txBody>
@@ -1851,8 +3609,8 @@
 </p:notes>
 </file>
 
-<file path=ppt/notesSlides/notesSlide9.xml><?xml version="1.0" encoding="utf-8"?>
-<p:notes xmlns:a="http://schemas.openxmlformats.org/drawingml/2006/main" xmlns:p="http://schemas.openxmlformats.org/presentationml/2006/main" xmlns:r="http://schemas.openxmlformats.org/officeDocument/2006/relationships">
+<file path=ppt/notesSlides/notesSlide7.xml><?xml version="1.0" encoding="utf-8"?>
+<p:notes xmlns:a="http://schemas.openxmlformats.org/drawingml/2006/main" xmlns:p="http://schemas.openxmlformats.org/presentationml/2006/main">
   <p:cSld>
     <p:spTree>
       <p:nvGrpSpPr>
@@ -1894,7 +3652,421 @@
         <p:txBody>
           <a:bodyPr/>
           <a:lstStyle/>
-          <a:p/>
+          <a:p>
+            <a:r>
+              <a:t>TEACHING PURPOSE</a:t>
+            </a:r>
+          </a:p>
+          <a:p>
+            <a:r>
+              <a:t>Index</a:t>
+            </a:r>
+          </a:p>
+          <a:p>
+            <a:r>
+              <a:t/>
+            </a:r>
+          </a:p>
+          <a:p>
+            <a:r>
+              <a:t>CONNECT</a:t>
+            </a:r>
+          </a:p>
+          <a:p>
+            <a:r>
+              <a:t>Build on the preceding slide: groupby.</a:t>
+            </a:r>
+          </a:p>
+          <a:p>
+            <a:r>
+              <a:t/>
+            </a:r>
+          </a:p>
+          <a:p>
+            <a:r>
+              <a:t>LECTURER CUE</a:t>
+            </a:r>
+          </a:p>
+          <a:p>
+            <a:r>
+              <a:t>The labels down the side of a DataFrame. After a groupby your grouping keys become the index rather than columns, which is the commonest confusion in pandas.</a:t>
+            </a:r>
+          </a:p>
+          <a:p>
+            <a:r>
+              <a:t/>
+            </a:r>
+          </a:p>
+          <a:p>
+            <a:r>
+              <a:t>EXPLAIN IN ORDINARY WORDS</a:t>
+            </a:r>
+          </a:p>
+          <a:p>
+            <a:r>
+              <a:t>A list keeps items in order. Python positions start at zero. In [2,4,6], position 0 contains 2 and position 2 contains 6. A slice excludes its stop position.</a:t>
+            </a:r>
+          </a:p>
+          <a:p>
+            <a:r>
+              <a:t/>
+            </a:r>
+          </a:p>
+          <a:p>
+            <a:r>
+              <a:t>CHECK AND EXPECTED ANSWER</a:t>
+            </a:r>
+          </a:p>
+          <a:p>
+            <a:r>
+              <a:t>What is [2,4,6][1]? 4. Is there a position 3? No.</a:t>
+            </a:r>
+          </a:p>
+          <a:p>
+            <a:r>
+              <a:t/>
+            </a:r>
+          </a:p>
+          <a:p>
+            <a:r>
+              <a:t>IF LEARNERS ARE STUCK</a:t>
+            </a:r>
+          </a:p>
+          <a:p>
+            <a:r>
+              <a:t>Draw three numbered boxes starting at zero. Keep the position separate from the value stored in it.</a:t>
+            </a:r>
+          </a:p>
+          <a:p>
+            <a:r>
+              <a:t/>
+            </a:r>
+          </a:p>
+          <a:p>
+            <a:r>
+              <a:t>NEXT</a:t>
+            </a:r>
+          </a:p>
+          <a:p>
+            <a:r>
+              <a:t>merge, and validate. Move on after a learner can explain the current example or required action.</a:t>
+            </a:r>
+          </a:p>
+        </p:txBody>
+      </p:sp>
+      <p:sp>
+        <p:nvSpPr>
+          <p:cNvPr id="4" name="Slide Number Placeholder 3"/>
+          <p:cNvSpPr>
+            <a:spLocks noGrp="1"/>
+          </p:cNvSpPr>
+          <p:nvPr>
+            <p:ph type="sldNum" idx="5" sz="quarter"/>
+          </p:nvPr>
+        </p:nvSpPr>
+        <p:spPr/>
+      </p:sp>
+    </p:spTree>
+  </p:cSld>
+  <p:clrMapOvr>
+    <a:masterClrMapping/>
+  </p:clrMapOvr>
+</p:notes>
+</file>
+
+<file path=ppt/notesSlides/notesSlide8.xml><?xml version="1.0" encoding="utf-8"?>
+<p:notes xmlns:a="http://schemas.openxmlformats.org/drawingml/2006/main" xmlns:p="http://schemas.openxmlformats.org/presentationml/2006/main">
+  <p:cSld>
+    <p:spTree>
+      <p:nvGrpSpPr>
+        <p:cNvPr id="1" name=""/>
+        <p:cNvGrpSpPr/>
+        <p:nvPr/>
+      </p:nvGrpSpPr>
+      <p:grpSpPr>
+        <a:xfrm>
+          <a:off x="0" y="0"/>
+          <a:ext cx="0" cy="0"/>
+          <a:chOff x="0" y="0"/>
+          <a:chExt cx="0" cy="0"/>
+        </a:xfrm>
+      </p:grpSpPr>
+      <p:sp>
+        <p:nvSpPr>
+          <p:cNvPr id="2" name="Slide Image Placeholder 1"/>
+          <p:cNvSpPr>
+            <a:spLocks noGrp="1"/>
+          </p:cNvSpPr>
+          <p:nvPr>
+            <p:ph type="sldImg" idx="2"/>
+          </p:nvPr>
+        </p:nvSpPr>
+        <p:spPr/>
+      </p:sp>
+      <p:sp>
+        <p:nvSpPr>
+          <p:cNvPr id="3" name="Notes Placeholder 2"/>
+          <p:cNvSpPr>
+            <a:spLocks noGrp="1"/>
+          </p:cNvSpPr>
+          <p:nvPr>
+            <p:ph type="body" idx="3" sz="quarter"/>
+          </p:nvPr>
+        </p:nvSpPr>
+        <p:spPr/>
+        <p:txBody>
+          <a:bodyPr/>
+          <a:lstStyle/>
+          <a:p>
+            <a:r>
+              <a:t>TEACHING PURPOSE</a:t>
+            </a:r>
+          </a:p>
+          <a:p>
+            <a:r>
+              <a:t>merge, and validate</a:t>
+            </a:r>
+          </a:p>
+          <a:p>
+            <a:r>
+              <a:t/>
+            </a:r>
+          </a:p>
+          <a:p>
+            <a:r>
+              <a:t>CONNECT</a:t>
+            </a:r>
+          </a:p>
+          <a:p>
+            <a:r>
+              <a:t>Build on the preceding slide: Index.</a:t>
+            </a:r>
+          </a:p>
+          <a:p>
+            <a:r>
+              <a:t/>
+            </a:r>
+          </a:p>
+          <a:p>
+            <a:r>
+              <a:t>LECTURER CUE</a:t>
+            </a:r>
+          </a:p>
+          <a:p>
+            <a:r>
+              <a:t>merge is pandas' join. validate is the argument that makes it REFUSE a join that would multiply rows instead of silently doing it.</a:t>
+            </a:r>
+          </a:p>
+          <a:p>
+            <a:r>
+              <a:t/>
+            </a:r>
+          </a:p>
+          <a:p>
+            <a:r>
+              <a:t>EXPLAIN IN ORDINARY WORDS</a:t>
+            </a:r>
+          </a:p>
+          <a:p>
+            <a:r>
+              <a:t>Grain means what one row represents. A key identifies a row; a primary key may use more than one column. A join matches keys, and multiple matches can multiply rows.</a:t>
+            </a:r>
+          </a:p>
+          <a:p>
+            <a:r>
+              <a:t/>
+            </a:r>
+          </a:p>
+          <a:p>
+            <a:r>
+              <a:t>CHECK AND EXPECTED ANSWER</a:t>
+            </a:r>
+          </a:p>
+          <a:p>
+            <a:r>
+              <a:t>One order has two lines. After joining orders to lines, how many rows for it? Two. Summing a repeated order-level total would double-count.</a:t>
+            </a:r>
+          </a:p>
+          <a:p>
+            <a:r>
+              <a:t/>
+            </a:r>
+          </a:p>
+          <a:p>
+            <a:r>
+              <a:t>IF LEARNERS ARE STUCK</a:t>
+            </a:r>
+          </a:p>
+          <a:p>
+            <a:r>
+              <a:t>Write one example row from each table. Circle keys and trace each match. Aggregate to the intended grain and check counts and totals.</a:t>
+            </a:r>
+          </a:p>
+          <a:p>
+            <a:r>
+              <a:t/>
+            </a:r>
+          </a:p>
+          <a:p>
+            <a:r>
+              <a:t>NEXT</a:t>
+            </a:r>
+          </a:p>
+          <a:p>
+            <a:r>
+              <a:t>groupby, and the four characters that fix it. Move on after a learner can explain the current example or required action.</a:t>
+            </a:r>
+          </a:p>
+        </p:txBody>
+      </p:sp>
+      <p:sp>
+        <p:nvSpPr>
+          <p:cNvPr id="4" name="Slide Number Placeholder 3"/>
+          <p:cNvSpPr>
+            <a:spLocks noGrp="1"/>
+          </p:cNvSpPr>
+          <p:nvPr>
+            <p:ph type="sldNum" idx="5" sz="quarter"/>
+          </p:nvPr>
+        </p:nvSpPr>
+        <p:spPr/>
+      </p:sp>
+    </p:spTree>
+  </p:cSld>
+  <p:clrMapOvr>
+    <a:masterClrMapping/>
+  </p:clrMapOvr>
+</p:notes>
+</file>
+
+<file path=ppt/notesSlides/notesSlide9.xml><?xml version="1.0" encoding="utf-8"?>
+<p:notes xmlns:a="http://schemas.openxmlformats.org/drawingml/2006/main" xmlns:p="http://schemas.openxmlformats.org/presentationml/2006/main">
+  <p:cSld>
+    <p:spTree>
+      <p:nvGrpSpPr>
+        <p:cNvPr id="1" name=""/>
+        <p:cNvGrpSpPr/>
+        <p:nvPr/>
+      </p:nvGrpSpPr>
+      <p:grpSpPr>
+        <a:xfrm>
+          <a:off x="0" y="0"/>
+          <a:ext cx="0" cy="0"/>
+          <a:chOff x="0" y="0"/>
+          <a:chExt cx="0" cy="0"/>
+        </a:xfrm>
+      </p:grpSpPr>
+      <p:sp>
+        <p:nvSpPr>
+          <p:cNvPr id="2" name="Slide Image Placeholder 1"/>
+          <p:cNvSpPr>
+            <a:spLocks noGrp="1"/>
+          </p:cNvSpPr>
+          <p:nvPr>
+            <p:ph type="sldImg" idx="2"/>
+          </p:nvPr>
+        </p:nvSpPr>
+        <p:spPr/>
+      </p:sp>
+      <p:sp>
+        <p:nvSpPr>
+          <p:cNvPr id="3" name="Notes Placeholder 2"/>
+          <p:cNvSpPr>
+            <a:spLocks noGrp="1"/>
+          </p:cNvSpPr>
+          <p:nvPr>
+            <p:ph type="body" idx="3" sz="quarter"/>
+          </p:nvPr>
+        </p:nvSpPr>
+        <p:spPr/>
+        <p:txBody>
+          <a:bodyPr/>
+          <a:lstStyle/>
+          <a:p>
+            <a:r>
+              <a:t>TEACHING PURPOSE</a:t>
+            </a:r>
+          </a:p>
+          <a:p>
+            <a:r>
+              <a:t>groupby, and the four characters that fix it</a:t>
+            </a:r>
+          </a:p>
+          <a:p>
+            <a:r>
+              <a:t/>
+            </a:r>
+          </a:p>
+          <a:p>
+            <a:r>
+              <a:t>CONNECT</a:t>
+            </a:r>
+          </a:p>
+          <a:p>
+            <a:r>
+              <a:t>Build on the preceding slide: merge, and validate.</a:t>
+            </a:r>
+          </a:p>
+          <a:p>
+            <a:r>
+              <a:t/>
+            </a:r>
+          </a:p>
+          <a:p>
+            <a:r>
+              <a:t>EXPLAIN IN ORDINARY WORDS</a:t>
+            </a:r>
+          </a:p>
+          <a:p>
+            <a:r>
+              <a:t>Grouping puts rows sharing a key into buckets, then computes a result for each bucket. WHERE filters rows before SQL grouping; HAVING filters grouped results.</a:t>
+            </a:r>
+          </a:p>
+          <a:p>
+            <a:r>
+              <a:t/>
+            </a:r>
+          </a:p>
+          <a:p>
+            <a:r>
+              <a:t>CHECK AND EXPECTED ANSWER</a:t>
+            </a:r>
+          </a:p>
+          <a:p>
+            <a:r>
+              <a:t>Which condition keeps only groups with more than five rows? HAVING COUNT(*) &gt; 5.</a:t>
+            </a:r>
+          </a:p>
+          <a:p>
+            <a:r>
+              <a:t/>
+            </a:r>
+          </a:p>
+          <a:p>
+            <a:r>
+              <a:t>IF LEARNERS ARE STUCK</a:t>
+            </a:r>
+          </a:p>
+          <a:p>
+            <a:r>
+              <a:t>Draw two buckets and count by hand. Name the intended output grain before writing the aggregation.</a:t>
+            </a:r>
+          </a:p>
+          <a:p>
+            <a:r>
+              <a:t/>
+            </a:r>
+          </a:p>
+          <a:p>
+            <a:r>
+              <a:t>NEXT</a:t>
+            </a:r>
+          </a:p>
+          <a:p>
+            <a:r>
+              <a:t>Break. Move on after a learner can explain the current example or required action.</a:t>
+            </a:r>
+          </a:p>
         </p:txBody>
       </p:sp>
       <p:sp>
@@ -6092,7 +8264,7 @@
                 </a:solidFill>
                 <a:latin typeface="Calibri"/>
               </a:rPr>
-              <a:t>merge: the how argument against SQL's join types, indicator to see what matched, and validate to make pandas raise rather than fan out. Then the reconciliation: the same report from SQL and from pandas, set side by side,</a:t>
+              <a:t>merge: the how argument against SQL's join types, indicator to see what matched, and validate to make pandas raise rather than fan out.</a:t>
             </a:r>
           </a:p>
         </p:txBody>
@@ -8710,7 +10882,7 @@
         <p:spPr>
           <a:xfrm>
             <a:off x="685800" y="1600200"/>
-            <a:ext cx="10820095" cy="1100371"/>
+            <a:ext cx="10820095" cy="1603291"/>
           </a:xfrm>
           <a:prstGeom prst="rect">
             <a:avLst/>
@@ -8751,7 +10923,7 @@
         </p:nvSpPr>
         <p:spPr>
           <a:xfrm>
-            <a:off x="685800" y="2792011"/>
+            <a:off x="685800" y="3477811"/>
             <a:ext cx="10820095" cy="457200"/>
           </a:xfrm>
           <a:prstGeom prst="rect">
@@ -11857,7 +14029,7 @@
         <p:spPr>
           <a:xfrm>
             <a:off x="685800" y="1911095"/>
-            <a:ext cx="10820095" cy="969264"/>
+            <a:ext cx="10820095" cy="1236629"/>
           </a:xfrm>
           <a:prstGeom prst="roundRect">
             <a:avLst>
@@ -11902,7 +14074,7 @@
         <p:spPr>
           <a:xfrm>
             <a:off x="978408" y="2112264"/>
-            <a:ext cx="10234879" cy="603504"/>
+            <a:ext cx="10234879" cy="870869"/>
           </a:xfrm>
           <a:prstGeom prst="rect">
             <a:avLst/>
@@ -11943,7 +14115,7 @@
         </p:nvSpPr>
         <p:spPr>
           <a:xfrm>
-            <a:off x="685800" y="3191256"/>
+            <a:off x="685800" y="3422045"/>
             <a:ext cx="10820095" cy="310896"/>
           </a:xfrm>
           <a:prstGeom prst="rect">
@@ -11969,7 +14141,7 @@
                 </a:solidFill>
                 <a:latin typeface="Calibri"/>
               </a:rPr>
-              <a:t>Work these questions in order:</a:t>
+              <a:t>Work these questions in order</a:t>
             </a:r>
           </a:p>
         </p:txBody>
@@ -11982,8 +14154,8 @@
         </p:nvSpPr>
         <p:spPr>
           <a:xfrm>
-            <a:off x="685800" y="3611879"/>
-            <a:ext cx="5227167" cy="365760"/>
+            <a:off x="685800" y="3897533"/>
+            <a:ext cx="5227167" cy="385501"/>
           </a:xfrm>
           <a:prstGeom prst="rect">
             <a:avLst/>
@@ -12011,7 +14183,7 @@
                 </a:solidFill>
                 <a:latin typeface="Calibri"/>
               </a:rPr>
-              <a:t>→  Rebuild the report with groupby and merge.</a:t>
+              <a:t>Rebuild the report with groupby and merge.</a:t>
             </a:r>
           </a:p>
         </p:txBody>
@@ -12024,8 +14196,8 @@
         </p:nvSpPr>
         <p:spPr>
           <a:xfrm>
-            <a:off x="685800" y="4032504"/>
-            <a:ext cx="5227167" cy="365760"/>
+            <a:off x="685800" y="4374475"/>
+            <a:ext cx="5227167" cy="385501"/>
           </a:xfrm>
           <a:prstGeom prst="rect">
             <a:avLst/>
@@ -12053,7 +14225,7 @@
                 </a:solidFill>
                 <a:latin typeface="Calibri"/>
               </a:rPr>
-              <a:t>→  Print the row count after every merge.</a:t>
+              <a:t>Print the row count after every merge.</a:t>
             </a:r>
           </a:p>
         </p:txBody>
@@ -12066,8 +14238,8 @@
         </p:nvSpPr>
         <p:spPr>
           <a:xfrm>
-            <a:off x="685800" y="4453128"/>
-            <a:ext cx="5227167" cy="365760"/>
+            <a:off x="685800" y="4851416"/>
+            <a:ext cx="5227167" cy="697851"/>
           </a:xfrm>
           <a:prstGeom prst="rect">
             <a:avLst/>
@@ -12095,7 +14267,7 @@
                 </a:solidFill>
                 <a:latin typeface="Calibri"/>
               </a:rPr>
-              <a:t>→  Merge your result against the SQL output with indicator=True.</a:t>
+              <a:t>Merge your result against the SQL output with indicator=True.</a:t>
             </a:r>
           </a:p>
         </p:txBody>
@@ -12108,8 +14280,8 @@
         </p:nvSpPr>
         <p:spPr>
           <a:xfrm>
-            <a:off x="6278727" y="3611879"/>
-            <a:ext cx="5227167" cy="365760"/>
+            <a:off x="6278727" y="3897533"/>
+            <a:ext cx="5227167" cy="385501"/>
           </a:xfrm>
           <a:prstGeom prst="rect">
             <a:avLst/>
@@ -12137,7 +14309,7 @@
                 </a:solidFill>
                 <a:latin typeface="Calibri"/>
               </a:rPr>
-              <a:t>→  List every difference and name the cause of each.</a:t>
+              <a:t>List every difference and name the cause of each.</a:t>
             </a:r>
           </a:p>
         </p:txBody>
@@ -12150,8 +14322,8 @@
         </p:nvSpPr>
         <p:spPr>
           <a:xfrm>
-            <a:off x="6278727" y="4032504"/>
-            <a:ext cx="5227167" cy="365760"/>
+            <a:off x="6278727" y="4374475"/>
+            <a:ext cx="5227167" cy="385501"/>
           </a:xfrm>
           <a:prstGeom prst="rect">
             <a:avLst/>
@@ -12179,7 +14351,7 @@
                 </a:solidFill>
                 <a:latin typeface="Calibri"/>
               </a:rPr>
-              <a:t>→  Submit with the cleaning log from last session.</a:t>
+              <a:t>Submit with the cleaning log from last session.</a:t>
             </a:r>
           </a:p>
         </p:txBody>
@@ -14658,7 +16830,7 @@
                 </a:solidFill>
                 <a:latin typeface="Calibri"/>
               </a:rPr>
-              <a:t>groupby as split, apply, combine, said in those words and then shown. One key, several keys, several aggregations at once, named output columns, and reset_index, which is the four characters that turn a confusing result </a:t>
+              <a:t>groupby as split, apply, combine, said in those words and then shown.</a:t>
             </a:r>
           </a:p>
         </p:txBody>
